--- a/ppt/长度的测量及测量工具的选用.pptx
+++ b/ppt/长度的测量及测量工具的选用.pptx
@@ -135,14 +135,6 @@
     </p:ext>
   </p:extLst>
 </p:presentation>
-</file>
-
-<file path=ppt/revisionInfo.xml><?xml version="1.0" encoding="utf-8"?>
-<p1510:revInfo xmlns:a="http://schemas.openxmlformats.org/drawingml/2006/main" xmlns:r="http://schemas.openxmlformats.org/officeDocument/2006/relationships" xmlns:p1510="http://schemas.microsoft.com/office/powerpoint/2015/10/main">
-  <p1510:revLst>
-    <p1510:client id="{E8AF5093-D47A-6F43-8E04-0759F16C2C21}" v="11" dt="2025-05-18T14:14:02.629"/>
-  </p1510:revLst>
-</p1510:revInfo>
 </file>
 
 <file path=ppt/notesMasters/notesMaster1.xml><?xml version="1.0" encoding="utf-8"?>
@@ -4154,7 +4146,7 @@
         <p:spPr bwMode="auto">
           <a:xfrm>
             <a:off x="467360" y="271780"/>
-            <a:ext cx="5360670" cy="521970"/>
+            <a:ext cx="5360670" cy="523220"/>
           </a:xfrm>
           <a:prstGeom prst="rect">
             <a:avLst/>
@@ -4191,7 +4183,7 @@
           <a:p>
             <a:pPr algn="just" hangingPunct="0"/>
             <a:r>
-              <a:rPr lang="zh-CN" altLang="en-US" sz="2800">
+              <a:rPr lang="zh-CN" altLang="en-US" sz="2800" dirty="0">
                 <a:latin typeface="微软雅黑" panose="020B0503020204020204" charset="-122"/>
                 <a:ea typeface="微软雅黑" panose="020B0503020204020204" charset="-122"/>
                 <a:cs typeface="微软雅黑" panose="020B0503020204020204" charset="-122"/>
@@ -4199,7 +4191,7 @@
               <a:t>二、</a:t>
             </a:r>
             <a:r>
-              <a:rPr lang="zh-CN" altLang="en-US" sz="2800">
+              <a:rPr lang="zh-CN" altLang="en-US" sz="2800" dirty="0">
                 <a:latin typeface="微软雅黑" panose="020B0503020204020204" charset="-122"/>
                 <a:ea typeface="微软雅黑" panose="020B0503020204020204" charset="-122"/>
                 <a:cs typeface="微软雅黑" panose="020B0503020204020204" charset="-122"/>
@@ -4207,11 +4199,20 @@
               </a:rPr>
               <a:t>螺旋测微器</a:t>
             </a:r>
-            <a:endParaRPr lang="zh-CN" altLang="en-US" sz="2800">
-              <a:latin typeface="微软雅黑" panose="020B0503020204020204" charset="-122"/>
-              <a:ea typeface="微软雅黑" panose="020B0503020204020204" charset="-122"/>
-              <a:cs typeface="微软雅黑" panose="020B0503020204020204" charset="-122"/>
-            </a:endParaRPr>
+            <a:r>
+              <a:rPr lang="en-US" altLang="zh-CN" sz="2800" dirty="0">
+                <a:latin typeface="微软雅黑" panose="020B0503020204020204" charset="-122"/>
+                <a:ea typeface="微软雅黑" panose="020B0503020204020204" charset="-122"/>
+                <a:cs typeface="微软雅黑" panose="020B0503020204020204" charset="-122"/>
+                <a:sym typeface="+mn-ea"/>
+              </a:rPr>
+              <a:t>(</a:t>
+            </a:r>
+            <a:r>
+              <a:rPr lang="en-US" sz="2800" b="1" dirty="0"/>
+              <a:t>micrometer)</a:t>
+            </a:r>
+            <a:endParaRPr lang="en-US" sz="2800" dirty="0"/>
           </a:p>
         </p:txBody>
       </p:sp>
@@ -7709,7 +7710,7 @@
 </file>
 
 <file path=ppt/slides/slide2.xml><?xml version="1.0" encoding="utf-8"?>
-<p:sld xmlns:a="http://schemas.openxmlformats.org/drawingml/2006/main" xmlns:r="http://schemas.openxmlformats.org/officeDocument/2006/relationships" xmlns:p="http://schemas.openxmlformats.org/presentationml/2006/main">
+<p:sld xmlns:a="http://schemas.openxmlformats.org/drawingml/2006/main" xmlns:r="http://schemas.openxmlformats.org/officeDocument/2006/relationships" xmlns:p="http://schemas.openxmlformats.org/presentationml/2006/main" show="0">
   <p:cSld>
     <p:spTree>
       <p:nvGrpSpPr>

--- a/ppt/长度的测量及测量工具的选用.pptx
+++ b/ppt/长度的测量及测量工具的选用.pptx
@@ -5,32 +5,33 @@
     <p:sldMasterId id="2147483648" r:id="rId1"/>
   </p:sldMasterIdLst>
   <p:notesMasterIdLst>
-    <p:notesMasterId r:id="rId25"/>
+    <p:notesMasterId r:id="rId26"/>
   </p:notesMasterIdLst>
   <p:sldIdLst>
     <p:sldId id="256" r:id="rId2"/>
     <p:sldId id="291" r:id="rId3"/>
-    <p:sldId id="257" r:id="rId4"/>
-    <p:sldId id="258" r:id="rId5"/>
-    <p:sldId id="259" r:id="rId6"/>
-    <p:sldId id="260" r:id="rId7"/>
-    <p:sldId id="261" r:id="rId8"/>
-    <p:sldId id="262" r:id="rId9"/>
-    <p:sldId id="263" r:id="rId10"/>
-    <p:sldId id="264" r:id="rId11"/>
-    <p:sldId id="265" r:id="rId12"/>
-    <p:sldId id="267" r:id="rId13"/>
-    <p:sldId id="266" r:id="rId14"/>
-    <p:sldId id="268" r:id="rId15"/>
-    <p:sldId id="269" r:id="rId16"/>
-    <p:sldId id="283" r:id="rId17"/>
-    <p:sldId id="284" r:id="rId18"/>
-    <p:sldId id="285" r:id="rId19"/>
-    <p:sldId id="286" r:id="rId20"/>
-    <p:sldId id="287" r:id="rId21"/>
-    <p:sldId id="288" r:id="rId22"/>
-    <p:sldId id="289" r:id="rId23"/>
-    <p:sldId id="290" r:id="rId24"/>
+    <p:sldId id="292" r:id="rId4"/>
+    <p:sldId id="257" r:id="rId5"/>
+    <p:sldId id="258" r:id="rId6"/>
+    <p:sldId id="259" r:id="rId7"/>
+    <p:sldId id="260" r:id="rId8"/>
+    <p:sldId id="261" r:id="rId9"/>
+    <p:sldId id="262" r:id="rId10"/>
+    <p:sldId id="263" r:id="rId11"/>
+    <p:sldId id="264" r:id="rId12"/>
+    <p:sldId id="265" r:id="rId13"/>
+    <p:sldId id="267" r:id="rId14"/>
+    <p:sldId id="266" r:id="rId15"/>
+    <p:sldId id="268" r:id="rId16"/>
+    <p:sldId id="269" r:id="rId17"/>
+    <p:sldId id="283" r:id="rId18"/>
+    <p:sldId id="284" r:id="rId19"/>
+    <p:sldId id="285" r:id="rId20"/>
+    <p:sldId id="286" r:id="rId21"/>
+    <p:sldId id="287" r:id="rId22"/>
+    <p:sldId id="288" r:id="rId23"/>
+    <p:sldId id="289" r:id="rId24"/>
+    <p:sldId id="290" r:id="rId25"/>
   </p:sldIdLst>
   <p:sldSz cx="12192000" cy="6858000"/>
   <p:notesSz cx="6858000" cy="9144000"/>
@@ -219,7 +220,7 @@
           <a:p>
             <a:fld id="{F49040AD-F759-4442-946B-3BB67E27A60A}" type="datetimeFigureOut">
               <a:rPr lang="en-US" smtClean="0"/>
-              <a:t>5/25/26</a:t>
+              <a:t>5/27/26</a:t>
             </a:fld>
             <a:endParaRPr lang="en-US"/>
           </a:p>
@@ -564,7 +565,7 @@
           <a:p>
             <a:fld id="{A3B02C48-7442-42A1-A2D3-5C71B5252205}" type="slidenum">
               <a:rPr lang="zh-CN" altLang="en-US" smtClean="0"/>
-              <a:t>15</a:t>
+              <a:t>16</a:t>
             </a:fld>
             <a:endParaRPr lang="zh-CN" altLang="en-US"/>
           </a:p>
@@ -738,7 +739,7 @@
           <a:p>
             <a:fld id="{8CA95057-F28B-4021-A46F-4C2D267CFC9D}" type="datetimeFigureOut">
               <a:rPr lang="en-US" smtClean="0"/>
-              <a:t>5/25/26</a:t>
+              <a:t>5/27/26</a:t>
             </a:fld>
             <a:endParaRPr lang="en-US"/>
           </a:p>
@@ -1012,7 +1013,7 @@
           <a:p>
             <a:fld id="{8CA95057-F28B-4021-A46F-4C2D267CFC9D}" type="datetimeFigureOut">
               <a:rPr lang="en-US" smtClean="0"/>
-              <a:t>5/25/26</a:t>
+              <a:t>5/27/26</a:t>
             </a:fld>
             <a:endParaRPr lang="en-US"/>
           </a:p>
@@ -1191,7 +1192,7 @@
           <a:p>
             <a:fld id="{8CA95057-F28B-4021-A46F-4C2D267CFC9D}" type="datetimeFigureOut">
               <a:rPr lang="en-US" smtClean="0"/>
-              <a:t>5/25/26</a:t>
+              <a:t>5/27/26</a:t>
             </a:fld>
             <a:endParaRPr lang="en-US"/>
           </a:p>
@@ -1348,7 +1349,7 @@
           <a:p>
             <a:fld id="{8CA95057-F28B-4021-A46F-4C2D267CFC9D}" type="datetimeFigureOut">
               <a:rPr lang="en-US" smtClean="0"/>
-              <a:t>5/25/26</a:t>
+              <a:t>5/27/26</a:t>
             </a:fld>
             <a:endParaRPr lang="en-US"/>
           </a:p>
@@ -1632,7 +1633,7 @@
           <a:p>
             <a:fld id="{8CA95057-F28B-4021-A46F-4C2D267CFC9D}" type="datetimeFigureOut">
               <a:rPr lang="en-US" smtClean="0"/>
-              <a:t>5/25/26</a:t>
+              <a:t>5/27/26</a:t>
             </a:fld>
             <a:endParaRPr lang="en-US"/>
           </a:p>
@@ -1910,7 +1911,7 @@
           <a:p>
             <a:fld id="{8CA95057-F28B-4021-A46F-4C2D267CFC9D}" type="datetimeFigureOut">
               <a:rPr lang="en-US" smtClean="0"/>
-              <a:t>5/25/26</a:t>
+              <a:t>5/27/26</a:t>
             </a:fld>
             <a:endParaRPr lang="en-US"/>
           </a:p>
@@ -2335,7 +2336,7 @@
           <a:p>
             <a:fld id="{8CA95057-F28B-4021-A46F-4C2D267CFC9D}" type="datetimeFigureOut">
               <a:rPr lang="en-US" smtClean="0"/>
-              <a:t>5/25/26</a:t>
+              <a:t>5/27/26</a:t>
             </a:fld>
             <a:endParaRPr lang="en-US"/>
           </a:p>
@@ -2448,7 +2449,7 @@
           <a:p>
             <a:fld id="{8CA95057-F28B-4021-A46F-4C2D267CFC9D}" type="datetimeFigureOut">
               <a:rPr lang="en-US" smtClean="0"/>
-              <a:t>5/25/26</a:t>
+              <a:t>5/27/26</a:t>
             </a:fld>
             <a:endParaRPr lang="en-US"/>
           </a:p>
@@ -2637,7 +2638,7 @@
           <a:p>
             <a:fld id="{D997B5FA-0921-464F-AAE1-844C04324D75}" type="datetimeFigureOut">
               <a:rPr lang="zh-CN" altLang="en-US" smtClean="0"/>
-              <a:t>2026/5/25</a:t>
+              <a:t>2026/5/27</a:t>
             </a:fld>
             <a:endParaRPr lang="zh-CN" altLang="en-US"/>
           </a:p>
@@ -2875,7 +2876,7 @@
           <a:p>
             <a:fld id="{8CA95057-F28B-4021-A46F-4C2D267CFC9D}" type="datetimeFigureOut">
               <a:rPr lang="en-US" smtClean="0"/>
-              <a:t>5/25/26</a:t>
+              <a:t>5/27/26</a:t>
             </a:fld>
             <a:endParaRPr lang="en-US"/>
           </a:p>
@@ -3448,6 +3449,102 @@
     </p:spTree>
     <p:extLst>
       <p:ext uri="{BB962C8B-B14F-4D97-AF65-F5344CB8AC3E}">
+        <p14:creationId xmlns:p14="http://schemas.microsoft.com/office/powerpoint/2010/main" val="3343866138"/>
+      </p:ext>
+    </p:extLst>
+  </p:cSld>
+  <p:clrMapOvr>
+    <a:masterClrMapping/>
+  </p:clrMapOvr>
+</p:sld>
+</file>
+
+<file path=ppt/slides/slide11.xml><?xml version="1.0" encoding="utf-8"?>
+<p:sld xmlns:a="http://schemas.openxmlformats.org/drawingml/2006/main" xmlns:r="http://schemas.openxmlformats.org/officeDocument/2006/relationships" xmlns:p="http://schemas.openxmlformats.org/presentationml/2006/main">
+  <p:cSld>
+    <p:spTree>
+      <p:nvGrpSpPr>
+        <p:cNvPr id="1" name=""/>
+        <p:cNvGrpSpPr/>
+        <p:nvPr/>
+      </p:nvGrpSpPr>
+      <p:grpSpPr>
+        <a:xfrm>
+          <a:off x="0" y="0"/>
+          <a:ext cx="0" cy="0"/>
+          <a:chOff x="0" y="0"/>
+          <a:chExt cx="0" cy="0"/>
+        </a:xfrm>
+      </p:grpSpPr>
+      <p:sp>
+        <p:nvSpPr>
+          <p:cNvPr id="2" name="标题 1">
+            <a:extLst>
+              <a:ext uri="{FF2B5EF4-FFF2-40B4-BE49-F238E27FC236}">
+                <a16:creationId xmlns:a16="http://schemas.microsoft.com/office/drawing/2014/main" id="{BFA967FC-6263-11E7-CC08-AF11E9145998}"/>
+              </a:ext>
+            </a:extLst>
+          </p:cNvPr>
+          <p:cNvSpPr>
+            <a:spLocks noGrp="1"/>
+          </p:cNvSpPr>
+          <p:nvPr>
+            <p:ph type="title"/>
+          </p:nvPr>
+        </p:nvSpPr>
+        <p:spPr/>
+        <p:txBody>
+          <a:bodyPr/>
+          <a:lstStyle/>
+          <a:p>
+            <a:r>
+              <a:rPr lang="zh-CN" altLang="en-US" dirty="0"/>
+              <a:t>读数是多少？</a:t>
+            </a:r>
+            <a:endParaRPr lang="en-US" dirty="0"/>
+          </a:p>
+        </p:txBody>
+      </p:sp>
+      <p:pic>
+        <p:nvPicPr>
+          <p:cNvPr id="47" name="内容占位符 46">
+            <a:extLst>
+              <a:ext uri="{FF2B5EF4-FFF2-40B4-BE49-F238E27FC236}">
+                <a16:creationId xmlns:a16="http://schemas.microsoft.com/office/drawing/2014/main" id="{02B2F942-312C-0141-9C7A-EEAF61FD3738}"/>
+              </a:ext>
+            </a:extLst>
+          </p:cNvPr>
+          <p:cNvPicPr>
+            <a:picLocks noGrp="1" noChangeAspect="1"/>
+          </p:cNvPicPr>
+          <p:nvPr>
+            <p:ph idx="1"/>
+          </p:nvPr>
+        </p:nvPicPr>
+        <p:blipFill>
+          <a:blip r:embed="rId2">
+            <a:extLst>
+              <a:ext uri="{96DAC541-7B7A-43D3-8B79-37D633B846F1}">
+                <asvg:svgBlip xmlns:asvg="http://schemas.microsoft.com/office/drawing/2016/SVG/main" r:embed="rId3"/>
+              </a:ext>
+            </a:extLst>
+          </a:blip>
+          <a:srcRect/>
+          <a:stretch/>
+        </p:blipFill>
+        <p:spPr>
+          <a:xfrm>
+            <a:off x="2054001" y="2056501"/>
+            <a:ext cx="8083997" cy="3889585"/>
+          </a:xfrm>
+          <a:prstGeom prst="rect">
+            <a:avLst/>
+          </a:prstGeom>
+        </p:spPr>
+      </p:pic>
+    </p:spTree>
+    <p:extLst>
+      <p:ext uri="{BB962C8B-B14F-4D97-AF65-F5344CB8AC3E}">
         <p14:creationId xmlns:p14="http://schemas.microsoft.com/office/powerpoint/2010/main" val="2810633720"/>
       </p:ext>
     </p:extLst>
@@ -3458,7 +3555,7 @@
 </p:sld>
 </file>
 
-<file path=ppt/slides/slide11.xml><?xml version="1.0" encoding="utf-8"?>
+<file path=ppt/slides/slide12.xml><?xml version="1.0" encoding="utf-8"?>
 <p:sld xmlns:a="http://schemas.openxmlformats.org/drawingml/2006/main" xmlns:r="http://schemas.openxmlformats.org/officeDocument/2006/relationships" xmlns:p="http://schemas.openxmlformats.org/presentationml/2006/main">
   <p:cSld>
     <p:spTree>
@@ -3554,7 +3651,7 @@
 </p:sld>
 </file>
 
-<file path=ppt/slides/slide12.xml><?xml version="1.0" encoding="utf-8"?>
+<file path=ppt/slides/slide13.xml><?xml version="1.0" encoding="utf-8"?>
 <p:sld xmlns:a="http://schemas.openxmlformats.org/drawingml/2006/main" xmlns:r="http://schemas.openxmlformats.org/officeDocument/2006/relationships" xmlns:p="http://schemas.openxmlformats.org/presentationml/2006/main">
   <p:cSld>
     <p:spTree>
@@ -3617,7 +3714,7 @@
 </p:sld>
 </file>
 
-<file path=ppt/slides/slide13.xml><?xml version="1.0" encoding="utf-8"?>
+<file path=ppt/slides/slide14.xml><?xml version="1.0" encoding="utf-8"?>
 <p:sld xmlns:a="http://schemas.openxmlformats.org/drawingml/2006/main" xmlns:r="http://schemas.openxmlformats.org/officeDocument/2006/relationships" xmlns:p="http://schemas.openxmlformats.org/presentationml/2006/main">
   <p:cSld>
     <p:spTree>
@@ -3680,7 +3777,7 @@
 </p:sld>
 </file>
 
-<file path=ppt/slides/slide14.xml><?xml version="1.0" encoding="utf-8"?>
+<file path=ppt/slides/slide15.xml><?xml version="1.0" encoding="utf-8"?>
 <p:sld xmlns:a="http://schemas.openxmlformats.org/drawingml/2006/main" xmlns:r="http://schemas.openxmlformats.org/officeDocument/2006/relationships" xmlns:p="http://schemas.openxmlformats.org/presentationml/2006/main">
   <p:cSld>
     <p:spTree>
@@ -3743,7 +3840,7 @@
 </p:sld>
 </file>
 
-<file path=ppt/slides/slide15.xml><?xml version="1.0" encoding="utf-8"?>
+<file path=ppt/slides/slide16.xml><?xml version="1.0" encoding="utf-8"?>
 <p:sld xmlns:a="http://schemas.openxmlformats.org/drawingml/2006/main" xmlns:r="http://schemas.openxmlformats.org/officeDocument/2006/relationships" xmlns:p="http://schemas.openxmlformats.org/presentationml/2006/main">
   <p:cSld>
     <p:spTree>
@@ -4114,7 +4211,7 @@
 </p:sld>
 </file>
 
-<file path=ppt/slides/slide16.xml><?xml version="1.0" encoding="utf-8"?>
+<file path=ppt/slides/slide17.xml><?xml version="1.0" encoding="utf-8"?>
 <p:sld xmlns:a="http://schemas.openxmlformats.org/drawingml/2006/main" xmlns:r="http://schemas.openxmlformats.org/officeDocument/2006/relationships" xmlns:p="http://schemas.openxmlformats.org/presentationml/2006/main">
   <p:cSld>
     <p:spTree>
@@ -4641,7 +4738,7 @@
 </p:sld>
 </file>
 
-<file path=ppt/slides/slide17.xml><?xml version="1.0" encoding="utf-8"?>
+<file path=ppt/slides/slide18.xml><?xml version="1.0" encoding="utf-8"?>
 <p:sld xmlns:a="http://schemas.openxmlformats.org/drawingml/2006/main" xmlns:r="http://schemas.openxmlformats.org/officeDocument/2006/relationships" xmlns:p="http://schemas.openxmlformats.org/presentationml/2006/main">
   <p:cSld>
     <p:spTree>
@@ -5084,7 +5181,7 @@
 </p:sld>
 </file>
 
-<file path=ppt/slides/slide18.xml><?xml version="1.0" encoding="utf-8"?>
+<file path=ppt/slides/slide19.xml><?xml version="1.0" encoding="utf-8"?>
 <p:sld xmlns:a="http://schemas.openxmlformats.org/drawingml/2006/main" xmlns:r="http://schemas.openxmlformats.org/officeDocument/2006/relationships" xmlns:p="http://schemas.openxmlformats.org/presentationml/2006/main">
   <p:cSld>
     <p:spTree>
@@ -6782,7 +6879,73 @@
 </p:sld>
 </file>
 
-<file path=ppt/slides/slide19.xml><?xml version="1.0" encoding="utf-8"?>
+<file path=ppt/slides/slide2.xml><?xml version="1.0" encoding="utf-8"?>
+<p:sld xmlns:a="http://schemas.openxmlformats.org/drawingml/2006/main" xmlns:r="http://schemas.openxmlformats.org/officeDocument/2006/relationships" xmlns:p="http://schemas.openxmlformats.org/presentationml/2006/main" show="0">
+  <p:cSld>
+    <p:spTree>
+      <p:nvGrpSpPr>
+        <p:cNvPr id="1" name=""/>
+        <p:cNvGrpSpPr/>
+        <p:nvPr/>
+      </p:nvGrpSpPr>
+      <p:grpSpPr>
+        <a:xfrm>
+          <a:off x="0" y="0"/>
+          <a:ext cx="0" cy="0"/>
+          <a:chOff x="0" y="0"/>
+          <a:chExt cx="0" cy="0"/>
+        </a:xfrm>
+      </p:grpSpPr>
+      <p:sp>
+        <p:nvSpPr>
+          <p:cNvPr id="2" name="Title 1">
+            <a:extLst>
+              <a:ext uri="{FF2B5EF4-FFF2-40B4-BE49-F238E27FC236}">
+                <a16:creationId xmlns:a16="http://schemas.microsoft.com/office/drawing/2014/main" id="{349D3CAB-FABF-B4E7-9E55-55BB17345880}"/>
+              </a:ext>
+            </a:extLst>
+          </p:cNvPr>
+          <p:cNvSpPr>
+            <a:spLocks noGrp="1"/>
+          </p:cNvSpPr>
+          <p:nvPr>
+            <p:ph type="title"/>
+          </p:nvPr>
+        </p:nvSpPr>
+        <p:spPr/>
+        <p:txBody>
+          <a:bodyPr>
+            <a:normAutofit fontScale="90000"/>
+          </a:bodyPr>
+          <a:lstStyle/>
+          <a:p>
+            <a:r>
+              <a:rPr kumimoji="1" lang="en-US" altLang="zh-CN" dirty="0">
+                <a:hlinkClick r:id="rId2"/>
+              </a:rPr>
+              <a:t>https://www.bilibili.com/video/BV1tT4y1A7AW/?spm_id_from=333.337.search-card.all.click</a:t>
+            </a:r>
+            <a:br>
+              <a:rPr kumimoji="1" lang="en-US" altLang="zh-CN" dirty="0"/>
+            </a:br>
+            <a:endParaRPr kumimoji="1" lang="zh-CN" altLang="en-US" dirty="0"/>
+          </a:p>
+        </p:txBody>
+      </p:sp>
+    </p:spTree>
+    <p:extLst>
+      <p:ext uri="{BB962C8B-B14F-4D97-AF65-F5344CB8AC3E}">
+        <p14:creationId xmlns:p14="http://schemas.microsoft.com/office/powerpoint/2010/main" val="1276061468"/>
+      </p:ext>
+    </p:extLst>
+  </p:cSld>
+  <p:clrMapOvr>
+    <a:masterClrMapping/>
+  </p:clrMapOvr>
+</p:sld>
+</file>
+
+<file path=ppt/slides/slide20.xml><?xml version="1.0" encoding="utf-8"?>
 <p:sld xmlns:a="http://schemas.openxmlformats.org/drawingml/2006/main" xmlns:r="http://schemas.openxmlformats.org/officeDocument/2006/relationships" xmlns:p="http://schemas.openxmlformats.org/presentationml/2006/main">
   <p:cSld>
     <p:spTree>
@@ -7709,73 +7872,7 @@
 </p:sld>
 </file>
 
-<file path=ppt/slides/slide2.xml><?xml version="1.0" encoding="utf-8"?>
-<p:sld xmlns:a="http://schemas.openxmlformats.org/drawingml/2006/main" xmlns:r="http://schemas.openxmlformats.org/officeDocument/2006/relationships" xmlns:p="http://schemas.openxmlformats.org/presentationml/2006/main" show="0">
-  <p:cSld>
-    <p:spTree>
-      <p:nvGrpSpPr>
-        <p:cNvPr id="1" name=""/>
-        <p:cNvGrpSpPr/>
-        <p:nvPr/>
-      </p:nvGrpSpPr>
-      <p:grpSpPr>
-        <a:xfrm>
-          <a:off x="0" y="0"/>
-          <a:ext cx="0" cy="0"/>
-          <a:chOff x="0" y="0"/>
-          <a:chExt cx="0" cy="0"/>
-        </a:xfrm>
-      </p:grpSpPr>
-      <p:sp>
-        <p:nvSpPr>
-          <p:cNvPr id="2" name="Title 1">
-            <a:extLst>
-              <a:ext uri="{FF2B5EF4-FFF2-40B4-BE49-F238E27FC236}">
-                <a16:creationId xmlns:a16="http://schemas.microsoft.com/office/drawing/2014/main" id="{349D3CAB-FABF-B4E7-9E55-55BB17345880}"/>
-              </a:ext>
-            </a:extLst>
-          </p:cNvPr>
-          <p:cNvSpPr>
-            <a:spLocks noGrp="1"/>
-          </p:cNvSpPr>
-          <p:nvPr>
-            <p:ph type="title"/>
-          </p:nvPr>
-        </p:nvSpPr>
-        <p:spPr/>
-        <p:txBody>
-          <a:bodyPr>
-            <a:normAutofit fontScale="90000"/>
-          </a:bodyPr>
-          <a:lstStyle/>
-          <a:p>
-            <a:r>
-              <a:rPr kumimoji="1" lang="en-US" altLang="zh-CN" dirty="0">
-                <a:hlinkClick r:id="rId2"/>
-              </a:rPr>
-              <a:t>https://www.bilibili.com/video/BV1tT4y1A7AW/?spm_id_from=333.337.search-card.all.click</a:t>
-            </a:r>
-            <a:br>
-              <a:rPr kumimoji="1" lang="en-US" altLang="zh-CN" dirty="0"/>
-            </a:br>
-            <a:endParaRPr kumimoji="1" lang="zh-CN" altLang="en-US" dirty="0"/>
-          </a:p>
-        </p:txBody>
-      </p:sp>
-    </p:spTree>
-    <p:extLst>
-      <p:ext uri="{BB962C8B-B14F-4D97-AF65-F5344CB8AC3E}">
-        <p14:creationId xmlns:p14="http://schemas.microsoft.com/office/powerpoint/2010/main" val="1276061468"/>
-      </p:ext>
-    </p:extLst>
-  </p:cSld>
-  <p:clrMapOvr>
-    <a:masterClrMapping/>
-  </p:clrMapOvr>
-</p:sld>
-</file>
-
-<file path=ppt/slides/slide20.xml><?xml version="1.0" encoding="utf-8"?>
+<file path=ppt/slides/slide21.xml><?xml version="1.0" encoding="utf-8"?>
 <p:sld xmlns:a="http://schemas.openxmlformats.org/drawingml/2006/main" xmlns:r="http://schemas.openxmlformats.org/officeDocument/2006/relationships" xmlns:p="http://schemas.openxmlformats.org/presentationml/2006/main">
   <p:cSld>
     <p:spTree>
@@ -8003,7 +8100,7 @@
 </p:sld>
 </file>
 
-<file path=ppt/slides/slide21.xml><?xml version="1.0" encoding="utf-8"?>
+<file path=ppt/slides/slide22.xml><?xml version="1.0" encoding="utf-8"?>
 <p:sld xmlns:a="http://schemas.openxmlformats.org/drawingml/2006/main" xmlns:r="http://schemas.openxmlformats.org/officeDocument/2006/relationships" xmlns:p="http://schemas.openxmlformats.org/presentationml/2006/main">
   <p:cSld>
     <p:spTree>
@@ -8282,7 +8379,7 @@
 </p:sld>
 </file>
 
-<file path=ppt/slides/slide22.xml><?xml version="1.0" encoding="utf-8"?>
+<file path=ppt/slides/slide23.xml><?xml version="1.0" encoding="utf-8"?>
 <p:sld xmlns:a="http://schemas.openxmlformats.org/drawingml/2006/main" xmlns:r="http://schemas.openxmlformats.org/officeDocument/2006/relationships" xmlns:p="http://schemas.openxmlformats.org/presentationml/2006/main">
   <p:cSld>
     <p:spTree>
@@ -8549,7 +8646,7 @@
 </p:sld>
 </file>
 
-<file path=ppt/slides/slide23.xml><?xml version="1.0" encoding="utf-8"?>
+<file path=ppt/slides/slide24.xml><?xml version="1.0" encoding="utf-8"?>
 <p:sld xmlns:a="http://schemas.openxmlformats.org/drawingml/2006/main" xmlns:r="http://schemas.openxmlformats.org/officeDocument/2006/relationships" xmlns:p="http://schemas.openxmlformats.org/presentationml/2006/main">
   <p:cSld>
     <p:spTree>
@@ -8835,6 +8932,70 @@
       </p:grpSpPr>
       <p:sp>
         <p:nvSpPr>
+          <p:cNvPr id="2" name="Content Placeholder 1">
+            <a:extLst>
+              <a:ext uri="{FF2B5EF4-FFF2-40B4-BE49-F238E27FC236}">
+                <a16:creationId xmlns:a16="http://schemas.microsoft.com/office/drawing/2014/main" id="{94E9A701-257C-6EFB-3DFB-E4D24AC00281}"/>
+              </a:ext>
+            </a:extLst>
+          </p:cNvPr>
+          <p:cNvSpPr>
+            <a:spLocks noGrp="1"/>
+          </p:cNvSpPr>
+          <p:nvPr>
+            <p:ph idx="1"/>
+          </p:nvPr>
+        </p:nvSpPr>
+        <p:spPr/>
+        <p:txBody>
+          <a:bodyPr/>
+          <a:lstStyle/>
+          <a:p>
+            <a:r>
+              <a:rPr lang="en-US" dirty="0">
+                <a:hlinkClick r:id="rId2"/>
+              </a:rPr>
+              <a:t>https://www.bilibili.com/video/BV1PL411H7nD/?spm_id_from=333.337.search-card.all.click</a:t>
+            </a:r>
+            <a:endParaRPr lang="en-US" dirty="0"/>
+          </a:p>
+          <a:p>
+            <a:endParaRPr lang="en-US" dirty="0"/>
+          </a:p>
+        </p:txBody>
+      </p:sp>
+    </p:spTree>
+    <p:extLst>
+      <p:ext uri="{BB962C8B-B14F-4D97-AF65-F5344CB8AC3E}">
+        <p14:creationId xmlns:p14="http://schemas.microsoft.com/office/powerpoint/2010/main" val="2422555676"/>
+      </p:ext>
+    </p:extLst>
+  </p:cSld>
+  <p:clrMapOvr>
+    <a:masterClrMapping/>
+  </p:clrMapOvr>
+</p:sld>
+</file>
+
+<file path=ppt/slides/slide4.xml><?xml version="1.0" encoding="utf-8"?>
+<p:sld xmlns:a="http://schemas.openxmlformats.org/drawingml/2006/main" xmlns:r="http://schemas.openxmlformats.org/officeDocument/2006/relationships" xmlns:p="http://schemas.openxmlformats.org/presentationml/2006/main">
+  <p:cSld>
+    <p:spTree>
+      <p:nvGrpSpPr>
+        <p:cNvPr id="1" name=""/>
+        <p:cNvGrpSpPr/>
+        <p:nvPr/>
+      </p:nvGrpSpPr>
+      <p:grpSpPr>
+        <a:xfrm>
+          <a:off x="0" y="0"/>
+          <a:ext cx="0" cy="0"/>
+          <a:chOff x="0" y="0"/>
+          <a:chExt cx="0" cy="0"/>
+        </a:xfrm>
+      </p:grpSpPr>
+      <p:sp>
+        <p:nvSpPr>
           <p:cNvPr id="2" name="标题 1">
             <a:extLst>
               <a:ext uri="{FF2B5EF4-FFF2-40B4-BE49-F238E27FC236}">
@@ -8923,7 +9084,7 @@
 </p:sld>
 </file>
 
-<file path=ppt/slides/slide4.xml><?xml version="1.0" encoding="utf-8"?>
+<file path=ppt/slides/slide5.xml><?xml version="1.0" encoding="utf-8"?>
 <p:sld xmlns:a="http://schemas.openxmlformats.org/drawingml/2006/main" xmlns:r="http://schemas.openxmlformats.org/officeDocument/2006/relationships" xmlns:p="http://schemas.openxmlformats.org/presentationml/2006/main">
   <p:cSld>
     <p:spTree>
@@ -10862,7 +11023,7 @@
 </p:sld>
 </file>
 
-<file path=ppt/slides/slide5.xml><?xml version="1.0" encoding="utf-8"?>
+<file path=ppt/slides/slide6.xml><?xml version="1.0" encoding="utf-8"?>
 <p:sld xmlns:a="http://schemas.openxmlformats.org/drawingml/2006/main" xmlns:r="http://schemas.openxmlformats.org/officeDocument/2006/relationships" xmlns:p="http://schemas.openxmlformats.org/presentationml/2006/main">
   <p:cSld>
     <p:spTree>
@@ -10985,7 +11146,7 @@
 </p:sld>
 </file>
 
-<file path=ppt/slides/slide6.xml><?xml version="1.0" encoding="utf-8"?>
+<file path=ppt/slides/slide7.xml><?xml version="1.0" encoding="utf-8"?>
 <p:sld xmlns:a="http://schemas.openxmlformats.org/drawingml/2006/main" xmlns:r="http://schemas.openxmlformats.org/officeDocument/2006/relationships" xmlns:p="http://schemas.openxmlformats.org/presentationml/2006/main">
   <p:cSld>
     <p:spTree>
@@ -11108,7 +11269,7 @@
 </p:sld>
 </file>
 
-<file path=ppt/slides/slide7.xml><?xml version="1.0" encoding="utf-8"?>
+<file path=ppt/slides/slide8.xml><?xml version="1.0" encoding="utf-8"?>
 <p:sld xmlns:a="http://schemas.openxmlformats.org/drawingml/2006/main" xmlns:r="http://schemas.openxmlformats.org/officeDocument/2006/relationships" xmlns:p="http://schemas.openxmlformats.org/presentationml/2006/main">
   <p:cSld>
     <p:spTree>
@@ -11231,7 +11392,7 @@
 </p:sld>
 </file>
 
-<file path=ppt/slides/slide8.xml><?xml version="1.0" encoding="utf-8"?>
+<file path=ppt/slides/slide9.xml><?xml version="1.0" encoding="utf-8"?>
 <p:sld xmlns:a="http://schemas.openxmlformats.org/drawingml/2006/main" xmlns:r="http://schemas.openxmlformats.org/officeDocument/2006/relationships" xmlns:p="http://schemas.openxmlformats.org/presentationml/2006/main">
   <p:cSld>
     <p:spTree>
@@ -11313,102 +11474,6 @@
     <p:extLst>
       <p:ext uri="{BB962C8B-B14F-4D97-AF65-F5344CB8AC3E}">
         <p14:creationId xmlns:p14="http://schemas.microsoft.com/office/powerpoint/2010/main" val="2383123016"/>
-      </p:ext>
-    </p:extLst>
-  </p:cSld>
-  <p:clrMapOvr>
-    <a:masterClrMapping/>
-  </p:clrMapOvr>
-</p:sld>
-</file>
-
-<file path=ppt/slides/slide9.xml><?xml version="1.0" encoding="utf-8"?>
-<p:sld xmlns:a="http://schemas.openxmlformats.org/drawingml/2006/main" xmlns:r="http://schemas.openxmlformats.org/officeDocument/2006/relationships" xmlns:p="http://schemas.openxmlformats.org/presentationml/2006/main">
-  <p:cSld>
-    <p:spTree>
-      <p:nvGrpSpPr>
-        <p:cNvPr id="1" name=""/>
-        <p:cNvGrpSpPr/>
-        <p:nvPr/>
-      </p:nvGrpSpPr>
-      <p:grpSpPr>
-        <a:xfrm>
-          <a:off x="0" y="0"/>
-          <a:ext cx="0" cy="0"/>
-          <a:chOff x="0" y="0"/>
-          <a:chExt cx="0" cy="0"/>
-        </a:xfrm>
-      </p:grpSpPr>
-      <p:sp>
-        <p:nvSpPr>
-          <p:cNvPr id="2" name="标题 1">
-            <a:extLst>
-              <a:ext uri="{FF2B5EF4-FFF2-40B4-BE49-F238E27FC236}">
-                <a16:creationId xmlns:a16="http://schemas.microsoft.com/office/drawing/2014/main" id="{BFA967FC-6263-11E7-CC08-AF11E9145998}"/>
-              </a:ext>
-            </a:extLst>
-          </p:cNvPr>
-          <p:cNvSpPr>
-            <a:spLocks noGrp="1"/>
-          </p:cNvSpPr>
-          <p:nvPr>
-            <p:ph type="title"/>
-          </p:nvPr>
-        </p:nvSpPr>
-        <p:spPr/>
-        <p:txBody>
-          <a:bodyPr/>
-          <a:lstStyle/>
-          <a:p>
-            <a:r>
-              <a:rPr lang="zh-CN" altLang="en-US" dirty="0"/>
-              <a:t>读数是多少？</a:t>
-            </a:r>
-            <a:endParaRPr lang="en-US" dirty="0"/>
-          </a:p>
-        </p:txBody>
-      </p:sp>
-      <p:pic>
-        <p:nvPicPr>
-          <p:cNvPr id="47" name="内容占位符 46">
-            <a:extLst>
-              <a:ext uri="{FF2B5EF4-FFF2-40B4-BE49-F238E27FC236}">
-                <a16:creationId xmlns:a16="http://schemas.microsoft.com/office/drawing/2014/main" id="{02B2F942-312C-0141-9C7A-EEAF61FD3738}"/>
-              </a:ext>
-            </a:extLst>
-          </p:cNvPr>
-          <p:cNvPicPr>
-            <a:picLocks noGrp="1" noChangeAspect="1"/>
-          </p:cNvPicPr>
-          <p:nvPr>
-            <p:ph idx="1"/>
-          </p:nvPr>
-        </p:nvPicPr>
-        <p:blipFill>
-          <a:blip r:embed="rId2">
-            <a:extLst>
-              <a:ext uri="{96DAC541-7B7A-43D3-8B79-37D633B846F1}">
-                <asvg:svgBlip xmlns:asvg="http://schemas.microsoft.com/office/drawing/2016/SVG/main" r:embed="rId3"/>
-              </a:ext>
-            </a:extLst>
-          </a:blip>
-          <a:srcRect/>
-          <a:stretch/>
-        </p:blipFill>
-        <p:spPr>
-          <a:xfrm>
-            <a:off x="2054001" y="2056501"/>
-            <a:ext cx="8083997" cy="3889585"/>
-          </a:xfrm>
-          <a:prstGeom prst="rect">
-            <a:avLst/>
-          </a:prstGeom>
-        </p:spPr>
-      </p:pic>
-    </p:spTree>
-    <p:extLst>
-      <p:ext uri="{BB962C8B-B14F-4D97-AF65-F5344CB8AC3E}">
-        <p14:creationId xmlns:p14="http://schemas.microsoft.com/office/powerpoint/2010/main" val="3343866138"/>
       </p:ext>
     </p:extLst>
   </p:cSld>
